--- a/OpenShift DO280 – Day 3.pptx
+++ b/OpenShift DO280 – Day 3.pptx
@@ -10,27 +10,28 @@
     <p:sldId id="258" r:id="rId4"/>
     <p:sldId id="259" r:id="rId5"/>
     <p:sldId id="275" r:id="rId6"/>
-    <p:sldId id="260" r:id="rId7"/>
-    <p:sldId id="261" r:id="rId8"/>
-    <p:sldId id="262" r:id="rId9"/>
-    <p:sldId id="263" r:id="rId10"/>
-    <p:sldId id="276" r:id="rId11"/>
-    <p:sldId id="280" r:id="rId12"/>
-    <p:sldId id="281" r:id="rId13"/>
-    <p:sldId id="264" r:id="rId14"/>
-    <p:sldId id="265" r:id="rId15"/>
-    <p:sldId id="266" r:id="rId16"/>
-    <p:sldId id="267" r:id="rId17"/>
-    <p:sldId id="268" r:id="rId18"/>
-    <p:sldId id="269" r:id="rId19"/>
-    <p:sldId id="270" r:id="rId20"/>
-    <p:sldId id="271" r:id="rId21"/>
-    <p:sldId id="272" r:id="rId22"/>
-    <p:sldId id="278" r:id="rId23"/>
-    <p:sldId id="279" r:id="rId24"/>
-    <p:sldId id="277" r:id="rId25"/>
-    <p:sldId id="273" r:id="rId26"/>
-    <p:sldId id="274" r:id="rId27"/>
+    <p:sldId id="282" r:id="rId7"/>
+    <p:sldId id="260" r:id="rId8"/>
+    <p:sldId id="261" r:id="rId9"/>
+    <p:sldId id="262" r:id="rId10"/>
+    <p:sldId id="263" r:id="rId11"/>
+    <p:sldId id="276" r:id="rId12"/>
+    <p:sldId id="280" r:id="rId13"/>
+    <p:sldId id="281" r:id="rId14"/>
+    <p:sldId id="264" r:id="rId15"/>
+    <p:sldId id="265" r:id="rId16"/>
+    <p:sldId id="266" r:id="rId17"/>
+    <p:sldId id="267" r:id="rId18"/>
+    <p:sldId id="268" r:id="rId19"/>
+    <p:sldId id="269" r:id="rId20"/>
+    <p:sldId id="270" r:id="rId21"/>
+    <p:sldId id="271" r:id="rId22"/>
+    <p:sldId id="272" r:id="rId23"/>
+    <p:sldId id="278" r:id="rId24"/>
+    <p:sldId id="279" r:id="rId25"/>
+    <p:sldId id="277" r:id="rId26"/>
+    <p:sldId id="273" r:id="rId27"/>
+    <p:sldId id="274" r:id="rId28"/>
   </p:sldIdLst>
   <p:sldSz cx="9144000" cy="6858000" type="screen4x3"/>
   <p:notesSz cx="6858000" cy="9144000"/>
@@ -43785,6 +43786,112 @@
 <file path=ppt/slides/slide10.xml><?xml version="1.0" encoding="utf-8"?>
 <p:sld xmlns:a="http://schemas.openxmlformats.org/drawingml/2006/main" xmlns:r="http://schemas.openxmlformats.org/officeDocument/2006/relationships" xmlns:p="http://schemas.openxmlformats.org/presentationml/2006/main">
   <p:cSld>
+    <p:bg>
+      <p:bgPr>
+        <a:gradFill rotWithShape="1">
+          <a:gsLst>
+            <a:gs pos="0">
+              <a:schemeClr val="bg2">
+                <a:tint val="90000"/>
+                <a:lumMod val="110000"/>
+              </a:schemeClr>
+            </a:gs>
+            <a:gs pos="100000">
+              <a:schemeClr val="bg2">
+                <a:shade val="64000"/>
+                <a:lumMod val="98000"/>
+              </a:schemeClr>
+            </a:gs>
+          </a:gsLst>
+          <a:lin ang="5400000" scaled="0"/>
+        </a:gradFill>
+        <a:effectLst/>
+      </p:bgPr>
+    </p:bg>
+    <p:spTree>
+      <p:nvGrpSpPr>
+        <p:cNvPr id="1" name=""/>
+        <p:cNvGrpSpPr/>
+        <p:nvPr/>
+      </p:nvGrpSpPr>
+      <p:grpSpPr>
+        <a:xfrm>
+          <a:off x="0" y="0"/>
+          <a:ext cx="0" cy="0"/>
+          <a:chOff x="0" y="0"/>
+          <a:chExt cx="0" cy="0"/>
+        </a:xfrm>
+      </p:grpSpPr>
+      <p:sp>
+        <p:nvSpPr>
+          <p:cNvPr id="2" name="Title 1"/>
+          <p:cNvSpPr>
+            <a:spLocks noGrp="1"/>
+          </p:cNvSpPr>
+          <p:nvPr>
+            <p:ph type="title"/>
+          </p:nvPr>
+        </p:nvSpPr>
+        <p:spPr>
+          <a:xfrm>
+            <a:off x="1320529" y="685800"/>
+            <a:ext cx="7306739" cy="1752599"/>
+          </a:xfrm>
+        </p:spPr>
+        <p:txBody>
+          <a:bodyPr>
+            <a:normAutofit/>
+          </a:bodyPr>
+          <a:lstStyle/>
+          <a:p>
+            <a:r>
+              <a:t>Expose Non-HTTP Apps</a:t>
+            </a:r>
+          </a:p>
+        </p:txBody>
+      </p:sp>
+      <p:graphicFrame>
+        <p:nvGraphicFramePr>
+          <p:cNvPr id="5" name="Content Placeholder 2">
+            <a:extLst>
+              <a:ext uri="{FF2B5EF4-FFF2-40B4-BE49-F238E27FC236}">
+                <a16:creationId xmlns:a16="http://schemas.microsoft.com/office/drawing/2014/main" id="{B5B9B8F2-D95D-85E7-24A1-D9E94B474510}"/>
+              </a:ext>
+            </a:extLst>
+          </p:cNvPr>
+          <p:cNvGraphicFramePr>
+            <a:graphicFrameLocks noGrp="1"/>
+          </p:cNvGraphicFramePr>
+          <p:nvPr>
+            <p:ph idx="1"/>
+            <p:extLst>
+              <p:ext uri="{D42A27DB-BD31-4B8C-83A1-F6EECF244321}">
+                <p14:modId xmlns:p14="http://schemas.microsoft.com/office/powerpoint/2010/main" val="1049553392"/>
+              </p:ext>
+            </p:extLst>
+          </p:nvPr>
+        </p:nvGraphicFramePr>
+        <p:xfrm>
+          <a:off x="1320528" y="2694562"/>
+          <a:ext cx="7306740" cy="3096638"/>
+        </p:xfrm>
+        <a:graphic>
+          <a:graphicData uri="http://schemas.openxmlformats.org/drawingml/2006/diagram">
+            <dgm:relIds xmlns:dgm="http://schemas.openxmlformats.org/drawingml/2006/diagram" xmlns:r="http://schemas.openxmlformats.org/officeDocument/2006/relationships" r:dm="rId2" r:lo="rId3" r:qs="rId4" r:cs="rId5"/>
+          </a:graphicData>
+        </a:graphic>
+      </p:graphicFrame>
+    </p:spTree>
+  </p:cSld>
+  <p:clrMapOvr>
+    <a:masterClrMapping/>
+  </p:clrMapOvr>
+</p:sld>
+</file>
+
+<file path=ppt/slides/slide11.xml><?xml version="1.0" encoding="utf-8"?>
+<p:sld xmlns:a="http://schemas.openxmlformats.org/drawingml/2006/main" xmlns:r="http://schemas.openxmlformats.org/officeDocument/2006/relationships" xmlns:p="http://schemas.openxmlformats.org/presentationml/2006/main">
+  <p:cSld>
     <p:spTree>
       <p:nvGrpSpPr>
         <p:cNvPr id="1" name=""/>
@@ -45241,7 +45348,7 @@
 </p:sld>
 </file>
 
-<file path=ppt/slides/slide11.xml><?xml version="1.0" encoding="utf-8"?>
+<file path=ppt/slides/slide12.xml><?xml version="1.0" encoding="utf-8"?>
 <p:sld xmlns:a="http://schemas.openxmlformats.org/drawingml/2006/main" xmlns:r="http://schemas.openxmlformats.org/officeDocument/2006/relationships" xmlns:p="http://schemas.openxmlformats.org/presentationml/2006/main">
   <p:cSld>
     <p:spTree>
@@ -45455,7 +45562,7 @@
 </p:sld>
 </file>
 
-<file path=ppt/slides/slide12.xml><?xml version="1.0" encoding="utf-8"?>
+<file path=ppt/slides/slide13.xml><?xml version="1.0" encoding="utf-8"?>
 <p:sld xmlns:a="http://schemas.openxmlformats.org/drawingml/2006/main" xmlns:r="http://schemas.openxmlformats.org/officeDocument/2006/relationships" xmlns:p="http://schemas.openxmlformats.org/presentationml/2006/main">
   <p:cSld>
     <p:spTree>
@@ -46602,7 +46709,7 @@
 </p:sld>
 </file>
 
-<file path=ppt/slides/slide13.xml><?xml version="1.0" encoding="utf-8"?>
+<file path=ppt/slides/slide14.xml><?xml version="1.0" encoding="utf-8"?>
 <p:sld xmlns:a="http://schemas.openxmlformats.org/drawingml/2006/main" xmlns:r="http://schemas.openxmlformats.org/officeDocument/2006/relationships" xmlns:p="http://schemas.openxmlformats.org/presentationml/2006/main">
   <p:cSld>
     <p:bg>
@@ -46708,7 +46815,7 @@
 </p:sld>
 </file>
 
-<file path=ppt/slides/slide14.xml><?xml version="1.0" encoding="utf-8"?>
+<file path=ppt/slides/slide15.xml><?xml version="1.0" encoding="utf-8"?>
 <p:sld xmlns:a="http://schemas.openxmlformats.org/drawingml/2006/main" xmlns:r="http://schemas.openxmlformats.org/officeDocument/2006/relationships" xmlns:p="http://schemas.openxmlformats.org/presentationml/2006/main">
   <p:cSld>
     <p:bg>
@@ -46814,7 +46921,7 @@
 </p:sld>
 </file>
 
-<file path=ppt/slides/slide15.xml><?xml version="1.0" encoding="utf-8"?>
+<file path=ppt/slides/slide16.xml><?xml version="1.0" encoding="utf-8"?>
 <p:sld xmlns:a="http://schemas.openxmlformats.org/drawingml/2006/main" xmlns:r="http://schemas.openxmlformats.org/officeDocument/2006/relationships" xmlns:p="http://schemas.openxmlformats.org/presentationml/2006/main">
   <p:cSld>
     <p:bg>
@@ -46920,7 +47027,7 @@
 </p:sld>
 </file>
 
-<file path=ppt/slides/slide16.xml><?xml version="1.0" encoding="utf-8"?>
+<file path=ppt/slides/slide17.xml><?xml version="1.0" encoding="utf-8"?>
 <p:sld xmlns:a="http://schemas.openxmlformats.org/drawingml/2006/main" xmlns:r="http://schemas.openxmlformats.org/officeDocument/2006/relationships" xmlns:p="http://schemas.openxmlformats.org/presentationml/2006/main">
   <p:cSld>
     <p:bg>
@@ -47026,7 +47133,7 @@
 </p:sld>
 </file>
 
-<file path=ppt/slides/slide17.xml><?xml version="1.0" encoding="utf-8"?>
+<file path=ppt/slides/slide18.xml><?xml version="1.0" encoding="utf-8"?>
 <p:sld xmlns:a="http://schemas.openxmlformats.org/drawingml/2006/main" xmlns:r="http://schemas.openxmlformats.org/officeDocument/2006/relationships" xmlns:p="http://schemas.openxmlformats.org/presentationml/2006/main">
   <p:cSld>
     <p:bg>
@@ -47627,7 +47734,7 @@
 </p:sld>
 </file>
 
-<file path=ppt/slides/slide18.xml><?xml version="1.0" encoding="utf-8"?>
+<file path=ppt/slides/slide19.xml><?xml version="1.0" encoding="utf-8"?>
 <p:sld xmlns:a="http://schemas.openxmlformats.org/drawingml/2006/main" xmlns:r="http://schemas.openxmlformats.org/officeDocument/2006/relationships" xmlns:p="http://schemas.openxmlformats.org/presentationml/2006/main">
   <p:cSld>
     <p:bg>
@@ -47733,7 +47840,113 @@
 </p:sld>
 </file>
 
-<file path=ppt/slides/slide19.xml><?xml version="1.0" encoding="utf-8"?>
+<file path=ppt/slides/slide2.xml><?xml version="1.0" encoding="utf-8"?>
+<p:sld xmlns:a="http://schemas.openxmlformats.org/drawingml/2006/main" xmlns:r="http://schemas.openxmlformats.org/officeDocument/2006/relationships" xmlns:p="http://schemas.openxmlformats.org/presentationml/2006/main">
+  <p:cSld>
+    <p:bg>
+      <p:bgPr>
+        <a:gradFill rotWithShape="1">
+          <a:gsLst>
+            <a:gs pos="0">
+              <a:schemeClr val="bg2">
+                <a:tint val="90000"/>
+                <a:lumMod val="110000"/>
+              </a:schemeClr>
+            </a:gs>
+            <a:gs pos="100000">
+              <a:schemeClr val="bg2">
+                <a:shade val="64000"/>
+                <a:lumMod val="98000"/>
+              </a:schemeClr>
+            </a:gs>
+          </a:gsLst>
+          <a:lin ang="5400000" scaled="0"/>
+        </a:gradFill>
+        <a:effectLst/>
+      </p:bgPr>
+    </p:bg>
+    <p:spTree>
+      <p:nvGrpSpPr>
+        <p:cNvPr id="1" name=""/>
+        <p:cNvGrpSpPr/>
+        <p:nvPr/>
+      </p:nvGrpSpPr>
+      <p:grpSpPr>
+        <a:xfrm>
+          <a:off x="0" y="0"/>
+          <a:ext cx="0" cy="0"/>
+          <a:chOff x="0" y="0"/>
+          <a:chExt cx="0" cy="0"/>
+        </a:xfrm>
+      </p:grpSpPr>
+      <p:sp>
+        <p:nvSpPr>
+          <p:cNvPr id="2" name="Title 1"/>
+          <p:cNvSpPr>
+            <a:spLocks noGrp="1"/>
+          </p:cNvSpPr>
+          <p:nvPr>
+            <p:ph type="title"/>
+          </p:nvPr>
+        </p:nvSpPr>
+        <p:spPr>
+          <a:xfrm>
+            <a:off x="1320529" y="685800"/>
+            <a:ext cx="7306739" cy="1752599"/>
+          </a:xfrm>
+        </p:spPr>
+        <p:txBody>
+          <a:bodyPr>
+            <a:normAutofit/>
+          </a:bodyPr>
+          <a:lstStyle/>
+          <a:p>
+            <a:r>
+              <a:t>Agenda</a:t>
+            </a:r>
+          </a:p>
+        </p:txBody>
+      </p:sp>
+      <p:graphicFrame>
+        <p:nvGraphicFramePr>
+          <p:cNvPr id="5" name="Content Placeholder 2">
+            <a:extLst>
+              <a:ext uri="{FF2B5EF4-FFF2-40B4-BE49-F238E27FC236}">
+                <a16:creationId xmlns:a16="http://schemas.microsoft.com/office/drawing/2014/main" id="{72E9C52F-EB15-228B-A98E-DA1EBFAFC2A6}"/>
+              </a:ext>
+            </a:extLst>
+          </p:cNvPr>
+          <p:cNvGraphicFramePr>
+            <a:graphicFrameLocks noGrp="1"/>
+          </p:cNvGraphicFramePr>
+          <p:nvPr>
+            <p:ph idx="1"/>
+            <p:extLst>
+              <p:ext uri="{D42A27DB-BD31-4B8C-83A1-F6EECF244321}">
+                <p14:modId xmlns:p14="http://schemas.microsoft.com/office/powerpoint/2010/main" val="155089351"/>
+              </p:ext>
+            </p:extLst>
+          </p:nvPr>
+        </p:nvGraphicFramePr>
+        <p:xfrm>
+          <a:off x="1320528" y="2694562"/>
+          <a:ext cx="7306740" cy="3096638"/>
+        </p:xfrm>
+        <a:graphic>
+          <a:graphicData uri="http://schemas.openxmlformats.org/drawingml/2006/diagram">
+            <dgm:relIds xmlns:dgm="http://schemas.openxmlformats.org/drawingml/2006/diagram" xmlns:r="http://schemas.openxmlformats.org/officeDocument/2006/relationships" r:dm="rId2" r:lo="rId3" r:qs="rId4" r:cs="rId5"/>
+          </a:graphicData>
+        </a:graphic>
+      </p:graphicFrame>
+    </p:spTree>
+  </p:cSld>
+  <p:clrMapOvr>
+    <a:masterClrMapping/>
+  </p:clrMapOvr>
+</p:sld>
+</file>
+
+<file path=ppt/slides/slide20.xml><?xml version="1.0" encoding="utf-8"?>
 <p:sld xmlns:a="http://schemas.openxmlformats.org/drawingml/2006/main" xmlns:r="http://schemas.openxmlformats.org/officeDocument/2006/relationships" xmlns:p="http://schemas.openxmlformats.org/presentationml/2006/main">
   <p:cSld>
     <p:bg>
@@ -48334,113 +48547,7 @@
 </p:sld>
 </file>
 
-<file path=ppt/slides/slide2.xml><?xml version="1.0" encoding="utf-8"?>
-<p:sld xmlns:a="http://schemas.openxmlformats.org/drawingml/2006/main" xmlns:r="http://schemas.openxmlformats.org/officeDocument/2006/relationships" xmlns:p="http://schemas.openxmlformats.org/presentationml/2006/main">
-  <p:cSld>
-    <p:bg>
-      <p:bgPr>
-        <a:gradFill rotWithShape="1">
-          <a:gsLst>
-            <a:gs pos="0">
-              <a:schemeClr val="bg2">
-                <a:tint val="90000"/>
-                <a:lumMod val="110000"/>
-              </a:schemeClr>
-            </a:gs>
-            <a:gs pos="100000">
-              <a:schemeClr val="bg2">
-                <a:shade val="64000"/>
-                <a:lumMod val="98000"/>
-              </a:schemeClr>
-            </a:gs>
-          </a:gsLst>
-          <a:lin ang="5400000" scaled="0"/>
-        </a:gradFill>
-        <a:effectLst/>
-      </p:bgPr>
-    </p:bg>
-    <p:spTree>
-      <p:nvGrpSpPr>
-        <p:cNvPr id="1" name=""/>
-        <p:cNvGrpSpPr/>
-        <p:nvPr/>
-      </p:nvGrpSpPr>
-      <p:grpSpPr>
-        <a:xfrm>
-          <a:off x="0" y="0"/>
-          <a:ext cx="0" cy="0"/>
-          <a:chOff x="0" y="0"/>
-          <a:chExt cx="0" cy="0"/>
-        </a:xfrm>
-      </p:grpSpPr>
-      <p:sp>
-        <p:nvSpPr>
-          <p:cNvPr id="2" name="Title 1"/>
-          <p:cNvSpPr>
-            <a:spLocks noGrp="1"/>
-          </p:cNvSpPr>
-          <p:nvPr>
-            <p:ph type="title"/>
-          </p:nvPr>
-        </p:nvSpPr>
-        <p:spPr>
-          <a:xfrm>
-            <a:off x="1320529" y="685800"/>
-            <a:ext cx="7306739" cy="1752599"/>
-          </a:xfrm>
-        </p:spPr>
-        <p:txBody>
-          <a:bodyPr>
-            <a:normAutofit/>
-          </a:bodyPr>
-          <a:lstStyle/>
-          <a:p>
-            <a:r>
-              <a:t>Agenda</a:t>
-            </a:r>
-          </a:p>
-        </p:txBody>
-      </p:sp>
-      <p:graphicFrame>
-        <p:nvGraphicFramePr>
-          <p:cNvPr id="5" name="Content Placeholder 2">
-            <a:extLst>
-              <a:ext uri="{FF2B5EF4-FFF2-40B4-BE49-F238E27FC236}">
-                <a16:creationId xmlns:a16="http://schemas.microsoft.com/office/drawing/2014/main" id="{72E9C52F-EB15-228B-A98E-DA1EBFAFC2A6}"/>
-              </a:ext>
-            </a:extLst>
-          </p:cNvPr>
-          <p:cNvGraphicFramePr>
-            <a:graphicFrameLocks noGrp="1"/>
-          </p:cNvGraphicFramePr>
-          <p:nvPr>
-            <p:ph idx="1"/>
-            <p:extLst>
-              <p:ext uri="{D42A27DB-BD31-4B8C-83A1-F6EECF244321}">
-                <p14:modId xmlns:p14="http://schemas.microsoft.com/office/powerpoint/2010/main" val="155089351"/>
-              </p:ext>
-            </p:extLst>
-          </p:nvPr>
-        </p:nvGraphicFramePr>
-        <p:xfrm>
-          <a:off x="1320528" y="2694562"/>
-          <a:ext cx="7306740" cy="3096638"/>
-        </p:xfrm>
-        <a:graphic>
-          <a:graphicData uri="http://schemas.openxmlformats.org/drawingml/2006/diagram">
-            <dgm:relIds xmlns:dgm="http://schemas.openxmlformats.org/drawingml/2006/diagram" xmlns:r="http://schemas.openxmlformats.org/officeDocument/2006/relationships" r:dm="rId2" r:lo="rId3" r:qs="rId4" r:cs="rId5"/>
-          </a:graphicData>
-        </a:graphic>
-      </p:graphicFrame>
-    </p:spTree>
-  </p:cSld>
-  <p:clrMapOvr>
-    <a:masterClrMapping/>
-  </p:clrMapOvr>
-</p:sld>
-</file>
-
-<file path=ppt/slides/slide20.xml><?xml version="1.0" encoding="utf-8"?>
+<file path=ppt/slides/slide21.xml><?xml version="1.0" encoding="utf-8"?>
 <p:sld xmlns:a="http://schemas.openxmlformats.org/drawingml/2006/main" xmlns:r="http://schemas.openxmlformats.org/officeDocument/2006/relationships" xmlns:p="http://schemas.openxmlformats.org/presentationml/2006/main">
   <p:cSld>
     <p:bg>
@@ -48693,7 +48800,7 @@
 </p:sld>
 </file>
 
-<file path=ppt/slides/slide21.xml><?xml version="1.0" encoding="utf-8"?>
+<file path=ppt/slides/slide22.xml><?xml version="1.0" encoding="utf-8"?>
 <p:sld xmlns:a="http://schemas.openxmlformats.org/drawingml/2006/main" xmlns:r="http://schemas.openxmlformats.org/officeDocument/2006/relationships" xmlns:p="http://schemas.openxmlformats.org/presentationml/2006/main">
   <p:cSld>
     <p:bg>
@@ -49294,7 +49401,7 @@
 </p:sld>
 </file>
 
-<file path=ppt/slides/slide22.xml><?xml version="1.0" encoding="utf-8"?>
+<file path=ppt/slides/slide23.xml><?xml version="1.0" encoding="utf-8"?>
 <p:sld xmlns:a="http://schemas.openxmlformats.org/drawingml/2006/main" xmlns:r="http://schemas.openxmlformats.org/officeDocument/2006/relationships" xmlns:p="http://schemas.openxmlformats.org/presentationml/2006/main">
   <p:cSld>
     <p:spTree>
@@ -49803,7 +49910,7 @@
 </p:sld>
 </file>
 
-<file path=ppt/slides/slide23.xml><?xml version="1.0" encoding="utf-8"?>
+<file path=ppt/slides/slide24.xml><?xml version="1.0" encoding="utf-8"?>
 <p:sld xmlns:a="http://schemas.openxmlformats.org/drawingml/2006/main" xmlns:r="http://schemas.openxmlformats.org/officeDocument/2006/relationships" xmlns:p="http://schemas.openxmlformats.org/presentationml/2006/main">
   <p:cSld>
     <p:spTree>
@@ -50355,7 +50462,7 @@
 </p:sld>
 </file>
 
-<file path=ppt/slides/slide24.xml><?xml version="1.0" encoding="utf-8"?>
+<file path=ppt/slides/slide25.xml><?xml version="1.0" encoding="utf-8"?>
 <p:sld xmlns:a="http://schemas.openxmlformats.org/drawingml/2006/main" xmlns:r="http://schemas.openxmlformats.org/officeDocument/2006/relationships" xmlns:p="http://schemas.openxmlformats.org/presentationml/2006/main">
   <p:cSld>
     <p:spTree>
@@ -52214,7 +52321,7 @@
 </p:sld>
 </file>
 
-<file path=ppt/slides/slide25.xml><?xml version="1.0" encoding="utf-8"?>
+<file path=ppt/slides/slide26.xml><?xml version="1.0" encoding="utf-8"?>
 <p:sld xmlns:a="http://schemas.openxmlformats.org/drawingml/2006/main" xmlns:r="http://schemas.openxmlformats.org/officeDocument/2006/relationships" xmlns:p="http://schemas.openxmlformats.org/presentationml/2006/main">
   <p:cSld>
     <p:bg>
@@ -52320,7 +52427,7 @@
 </p:sld>
 </file>
 
-<file path=ppt/slides/slide26.xml><?xml version="1.0" encoding="utf-8"?>
+<file path=ppt/slides/slide27.xml><?xml version="1.0" encoding="utf-8"?>
 <p:sld xmlns:a="http://schemas.openxmlformats.org/drawingml/2006/main" xmlns:r="http://schemas.openxmlformats.org/officeDocument/2006/relationships" xmlns:p="http://schemas.openxmlformats.org/presentationml/2006/main">
   <p:cSld>
     <p:bg>
@@ -54586,6 +54693,187 @@
 <file path=ppt/slides/slide6.xml><?xml version="1.0" encoding="utf-8"?>
 <p:sld xmlns:a="http://schemas.openxmlformats.org/drawingml/2006/main" xmlns:r="http://schemas.openxmlformats.org/officeDocument/2006/relationships" xmlns:p="http://schemas.openxmlformats.org/presentationml/2006/main">
   <p:cSld>
+    <p:spTree>
+      <p:nvGrpSpPr>
+        <p:cNvPr id="1" name=""/>
+        <p:cNvGrpSpPr/>
+        <p:nvPr/>
+      </p:nvGrpSpPr>
+      <p:grpSpPr>
+        <a:xfrm>
+          <a:off x="0" y="0"/>
+          <a:ext cx="0" cy="0"/>
+          <a:chOff x="0" y="0"/>
+          <a:chExt cx="0" cy="0"/>
+        </a:xfrm>
+      </p:grpSpPr>
+      <p:sp>
+        <p:nvSpPr>
+          <p:cNvPr id="2" name="Title 1">
+            <a:extLst>
+              <a:ext uri="{FF2B5EF4-FFF2-40B4-BE49-F238E27FC236}">
+                <a16:creationId xmlns:a16="http://schemas.microsoft.com/office/drawing/2014/main" id="{9376AF5B-A985-6F52-A630-BBC8409D1FA0}"/>
+              </a:ext>
+            </a:extLst>
+          </p:cNvPr>
+          <p:cNvSpPr>
+            <a:spLocks noGrp="1"/>
+          </p:cNvSpPr>
+          <p:nvPr>
+            <p:ph type="title"/>
+          </p:nvPr>
+        </p:nvSpPr>
+        <p:spPr>
+          <a:xfrm>
+            <a:off x="982133" y="457201"/>
+            <a:ext cx="7704667" cy="1166190"/>
+          </a:xfrm>
+        </p:spPr>
+        <p:txBody>
+          <a:bodyPr/>
+          <a:lstStyle/>
+          <a:p>
+            <a:r>
+              <a:rPr lang="en-US" dirty="0"/>
+              <a:t>Routes and Network Policy</a:t>
+            </a:r>
+          </a:p>
+        </p:txBody>
+      </p:sp>
+      <p:sp>
+        <p:nvSpPr>
+          <p:cNvPr id="3" name="Content Placeholder 2">
+            <a:extLst>
+              <a:ext uri="{FF2B5EF4-FFF2-40B4-BE49-F238E27FC236}">
+                <a16:creationId xmlns:a16="http://schemas.microsoft.com/office/drawing/2014/main" id="{463D2BB3-734E-C189-44B6-6569FB792103}"/>
+              </a:ext>
+            </a:extLst>
+          </p:cNvPr>
+          <p:cNvSpPr>
+            <a:spLocks noGrp="1"/>
+          </p:cNvSpPr>
+          <p:nvPr>
+            <p:ph idx="1"/>
+          </p:nvPr>
+        </p:nvSpPr>
+        <p:spPr>
+          <a:xfrm>
+            <a:off x="1305339" y="1749288"/>
+            <a:ext cx="7704667" cy="4611755"/>
+          </a:xfrm>
+        </p:spPr>
+        <p:txBody>
+          <a:bodyPr>
+            <a:normAutofit fontScale="85000" lnSpcReduction="10000"/>
+          </a:bodyPr>
+          <a:lstStyle/>
+          <a:p>
+            <a:r>
+              <a:rPr lang="en-US" dirty="0" err="1"/>
+              <a:t>oc</a:t>
+            </a:r>
+            <a:r>
+              <a:rPr lang="en-US" dirty="0"/>
+              <a:t> expose svc frontend</a:t>
+            </a:r>
+          </a:p>
+          <a:p>
+            <a:r>
+              <a:rPr lang="en-US" dirty="0"/>
+              <a:t>Creates a public URL → allows traffic </a:t>
+            </a:r>
+            <a:r>
+              <a:rPr lang="en-US" b="1" dirty="0"/>
+              <a:t>from outside → into your app</a:t>
+            </a:r>
+            <a:endParaRPr lang="en-US" dirty="0"/>
+          </a:p>
+          <a:p>
+            <a:r>
+              <a:rPr lang="en-US" dirty="0"/>
+              <a:t>User --HTTPS--&gt; Frontend --HTTP--&gt; Backend --HTTP--&gt; Database</a:t>
+            </a:r>
+          </a:p>
+          <a:p>
+            <a:endParaRPr lang="en-US" dirty="0"/>
+          </a:p>
+          <a:p>
+            <a:pPr marL="0" indent="0">
+              <a:buNone/>
+            </a:pPr>
+            <a:r>
+              <a:rPr lang="en-US" dirty="0"/>
+              <a:t>Route = Door to the building (external access)</a:t>
+            </a:r>
+            <a:br>
+              <a:rPr lang="en-US" dirty="0"/>
+            </a:br>
+            <a:r>
+              <a:rPr lang="en-US" dirty="0"/>
+              <a:t>Ingress Policy = Who can enter rooms</a:t>
+            </a:r>
+            <a:br>
+              <a:rPr lang="en-US" dirty="0"/>
+            </a:br>
+            <a:r>
+              <a:rPr lang="en-US" dirty="0"/>
+              <a:t>Egress Policy = Where people can go outside</a:t>
+            </a:r>
+          </a:p>
+          <a:p>
+            <a:pPr marL="0" indent="0">
+              <a:buNone/>
+            </a:pPr>
+            <a:endParaRPr lang="en-US" dirty="0"/>
+          </a:p>
+          <a:p>
+            <a:pPr marL="0" indent="0">
+              <a:buNone/>
+            </a:pPr>
+            <a:r>
+              <a:rPr lang="en-US" dirty="0"/>
+              <a:t>Internet → frontend (Route)</a:t>
+            </a:r>
+            <a:br>
+              <a:rPr lang="en-US" dirty="0"/>
+            </a:br>
+            <a:r>
+              <a:rPr lang="en-US" dirty="0"/>
+              <a:t>frontend → backend (Ingress allowed)</a:t>
+            </a:r>
+            <a:br>
+              <a:rPr lang="en-US" dirty="0"/>
+            </a:br>
+            <a:r>
+              <a:rPr lang="en-US" dirty="0"/>
+              <a:t>backend → DB (Ingress allowed)</a:t>
+            </a:r>
+            <a:br>
+              <a:rPr lang="en-US" dirty="0"/>
+            </a:br>
+            <a:r>
+              <a:rPr lang="en-US" dirty="0"/>
+              <a:t>backend → internet (Egress controlled)</a:t>
+            </a:r>
+          </a:p>
+        </p:txBody>
+      </p:sp>
+    </p:spTree>
+    <p:extLst>
+      <p:ext uri="{BB962C8B-B14F-4D97-AF65-F5344CB8AC3E}">
+        <p14:creationId xmlns:p14="http://schemas.microsoft.com/office/powerpoint/2010/main" val="679424249"/>
+      </p:ext>
+    </p:extLst>
+  </p:cSld>
+  <p:clrMapOvr>
+    <a:masterClrMapping/>
+  </p:clrMapOvr>
+</p:sld>
+</file>
+
+<file path=ppt/slides/slide7.xml><?xml version="1.0" encoding="utf-8"?>
+<p:sld xmlns:a="http://schemas.openxmlformats.org/drawingml/2006/main" xmlns:r="http://schemas.openxmlformats.org/officeDocument/2006/relationships" xmlns:p="http://schemas.openxmlformats.org/presentationml/2006/main">
+  <p:cSld>
     <p:bg>
       <p:bgPr>
         <a:gradFill rotWithShape="1">
@@ -54689,7 +54977,7 @@
 </p:sld>
 </file>
 
-<file path=ppt/slides/slide7.xml><?xml version="1.0" encoding="utf-8"?>
+<file path=ppt/slides/slide8.xml><?xml version="1.0" encoding="utf-8"?>
 <p:sld xmlns:a="http://schemas.openxmlformats.org/drawingml/2006/main" xmlns:r="http://schemas.openxmlformats.org/officeDocument/2006/relationships" xmlns:p="http://schemas.openxmlformats.org/presentationml/2006/main">
   <p:cSld>
     <p:bg>
@@ -54795,7 +55083,7 @@
 </p:sld>
 </file>
 
-<file path=ppt/slides/slide8.xml><?xml version="1.0" encoding="utf-8"?>
+<file path=ppt/slides/slide9.xml><?xml version="1.0" encoding="utf-8"?>
 <p:sld xmlns:a="http://schemas.openxmlformats.org/drawingml/2006/main" xmlns:r="http://schemas.openxmlformats.org/officeDocument/2006/relationships" xmlns:p="http://schemas.openxmlformats.org/presentationml/2006/main">
   <p:cSld>
     <p:bg>
@@ -56179,112 +56467,6 @@
 </p:sld>
 </file>
 
-<file path=ppt/slides/slide9.xml><?xml version="1.0" encoding="utf-8"?>
-<p:sld xmlns:a="http://schemas.openxmlformats.org/drawingml/2006/main" xmlns:r="http://schemas.openxmlformats.org/officeDocument/2006/relationships" xmlns:p="http://schemas.openxmlformats.org/presentationml/2006/main">
-  <p:cSld>
-    <p:bg>
-      <p:bgPr>
-        <a:gradFill rotWithShape="1">
-          <a:gsLst>
-            <a:gs pos="0">
-              <a:schemeClr val="bg2">
-                <a:tint val="90000"/>
-                <a:lumMod val="110000"/>
-              </a:schemeClr>
-            </a:gs>
-            <a:gs pos="100000">
-              <a:schemeClr val="bg2">
-                <a:shade val="64000"/>
-                <a:lumMod val="98000"/>
-              </a:schemeClr>
-            </a:gs>
-          </a:gsLst>
-          <a:lin ang="5400000" scaled="0"/>
-        </a:gradFill>
-        <a:effectLst/>
-      </p:bgPr>
-    </p:bg>
-    <p:spTree>
-      <p:nvGrpSpPr>
-        <p:cNvPr id="1" name=""/>
-        <p:cNvGrpSpPr/>
-        <p:nvPr/>
-      </p:nvGrpSpPr>
-      <p:grpSpPr>
-        <a:xfrm>
-          <a:off x="0" y="0"/>
-          <a:ext cx="0" cy="0"/>
-          <a:chOff x="0" y="0"/>
-          <a:chExt cx="0" cy="0"/>
-        </a:xfrm>
-      </p:grpSpPr>
-      <p:sp>
-        <p:nvSpPr>
-          <p:cNvPr id="2" name="Title 1"/>
-          <p:cNvSpPr>
-            <a:spLocks noGrp="1"/>
-          </p:cNvSpPr>
-          <p:nvPr>
-            <p:ph type="title"/>
-          </p:nvPr>
-        </p:nvSpPr>
-        <p:spPr>
-          <a:xfrm>
-            <a:off x="1320529" y="685800"/>
-            <a:ext cx="7306739" cy="1752599"/>
-          </a:xfrm>
-        </p:spPr>
-        <p:txBody>
-          <a:bodyPr>
-            <a:normAutofit/>
-          </a:bodyPr>
-          <a:lstStyle/>
-          <a:p>
-            <a:r>
-              <a:t>Expose Non-HTTP Apps</a:t>
-            </a:r>
-          </a:p>
-        </p:txBody>
-      </p:sp>
-      <p:graphicFrame>
-        <p:nvGraphicFramePr>
-          <p:cNvPr id="5" name="Content Placeholder 2">
-            <a:extLst>
-              <a:ext uri="{FF2B5EF4-FFF2-40B4-BE49-F238E27FC236}">
-                <a16:creationId xmlns:a16="http://schemas.microsoft.com/office/drawing/2014/main" id="{B5B9B8F2-D95D-85E7-24A1-D9E94B474510}"/>
-              </a:ext>
-            </a:extLst>
-          </p:cNvPr>
-          <p:cNvGraphicFramePr>
-            <a:graphicFrameLocks noGrp="1"/>
-          </p:cNvGraphicFramePr>
-          <p:nvPr>
-            <p:ph idx="1"/>
-            <p:extLst>
-              <p:ext uri="{D42A27DB-BD31-4B8C-83A1-F6EECF244321}">
-                <p14:modId xmlns:p14="http://schemas.microsoft.com/office/powerpoint/2010/main" val="1049553392"/>
-              </p:ext>
-            </p:extLst>
-          </p:nvPr>
-        </p:nvGraphicFramePr>
-        <p:xfrm>
-          <a:off x="1320528" y="2694562"/>
-          <a:ext cx="7306740" cy="3096638"/>
-        </p:xfrm>
-        <a:graphic>
-          <a:graphicData uri="http://schemas.openxmlformats.org/drawingml/2006/diagram">
-            <dgm:relIds xmlns:dgm="http://schemas.openxmlformats.org/drawingml/2006/diagram" xmlns:r="http://schemas.openxmlformats.org/officeDocument/2006/relationships" r:dm="rId2" r:lo="rId3" r:qs="rId4" r:cs="rId5"/>
-          </a:graphicData>
-        </a:graphic>
-      </p:graphicFrame>
-    </p:spTree>
-  </p:cSld>
-  <p:clrMapOvr>
-    <a:masterClrMapping/>
-  </p:clrMapOvr>
-</p:sld>
-</file>
-
 <file path=ppt/theme/theme1.xml><?xml version="1.0" encoding="utf-8"?>
 <a:theme xmlns:a="http://schemas.openxmlformats.org/drawingml/2006/main" name="Parallax">
   <a:themeElements>
